--- a/Biological Pattern Formation_Saumya.pptx
+++ b/Biological Pattern Formation_Saumya.pptx
@@ -4048,8 +4048,8 @@
           <a:lstStyle/>
           <a:p>
             <a:r>
-              <a:rPr lang="en-US" dirty="0" err="1" smtClean="0"/>
-              <a:t>Morhogenesis</a:t>
+              <a:rPr lang="en-US" dirty="0" smtClean="0"/>
+              <a:t>Morphogenesis</a:t>
             </a:r>
             <a:endParaRPr lang="en-US" dirty="0"/>
           </a:p>
@@ -4862,8 +4862,8 @@
           <a:lstStyle/>
           <a:p>
             <a:r>
-              <a:rPr lang="en-US" dirty="0" err="1" smtClean="0"/>
-              <a:t>Morhogenesis</a:t>
+              <a:rPr lang="en-US" dirty="0" smtClean="0"/>
+              <a:t>Morphogenesis</a:t>
             </a:r>
             <a:endParaRPr lang="en-US" dirty="0"/>
           </a:p>
